--- a/safira-presentation.pptx
+++ b/safira-presentation.pptx
@@ -1221,7 +1221,7 @@
               </a:rPr>
               <a:t>Protecting children and restoring hope since 2022.</a:t>
             </a:r>
-            <a:endParaRPr lang="en-US" sz="1800" dirty="0"/>
+            <a:endParaRPr lang="en-US" sz="1800" i="1" dirty="0"/>
           </a:p>
         </p:txBody>
       </p:sp>
@@ -4491,8 +4491,8 @@
         </p:blipFill>
         <p:spPr>
           <a:xfrm>
-            <a:off x="996635" y="227054"/>
-            <a:ext cx="7150729" cy="3716161"/>
+            <a:off x="830968" y="227054"/>
+            <a:ext cx="7482063" cy="3888352"/>
           </a:xfrm>
           <a:prstGeom prst="rect">
             <a:avLst/>

--- a/safira-presentation.pptx
+++ b/safira-presentation.pptx
@@ -3496,7 +3496,7 @@
 </file>
 
 <file path=ppt/slides/slide5.xml><?xml version="1.0" encoding="utf-8"?>
-<p:sld xmlns:a="http://schemas.openxmlformats.org/drawingml/2006/main" xmlns:r="http://schemas.openxmlformats.org/officeDocument/2006/relationships" xmlns:p="http://schemas.openxmlformats.org/presentationml/2006/main">
+<p:sld xmlns:a="http://schemas.openxmlformats.org/drawingml/2006/main" xmlns:r="http://schemas.openxmlformats.org/officeDocument/2006/relationships" xmlns:p="http://schemas.openxmlformats.org/presentationml/2006/main" show="0">
   <p:cSld name="Slide 5">
     <p:bg>
       <p:bgPr>
@@ -4392,7 +4392,7 @@
                 <a:ea typeface="Calibri" pitchFamily="34" charset="-122"/>
                 <a:cs typeface="Calibri" pitchFamily="34" charset="-120"/>
               </a:rPr>
-              <a:t>Link to page here:</a:t>
+              <a:t>Link to page here: www.safira.world</a:t>
             </a:r>
             <a:endParaRPr lang="en-US" sz="1800" dirty="0"/>
           </a:p>
